--- a/git_push_pull_progress.pptx
+++ b/git_push_pull_progress.pptx
@@ -261,7 +261,7 @@
           <a:p>
             <a:fld id="{AD24AED8-223C-4ADA-BBF9-2C880043F1F4}" type="datetimeFigureOut">
               <a:rPr lang="ko-KR" altLang="en-US" smtClean="0"/>
-              <a:t>2026-05-07</a:t>
+              <a:t>2026-05-18</a:t>
             </a:fld>
             <a:endParaRPr lang="ko-KR" altLang="en-US"/>
           </a:p>
@@ -438,7 +438,7 @@
           <a:p>
             <a:fld id="{AD24AED8-223C-4ADA-BBF9-2C880043F1F4}" type="datetimeFigureOut">
               <a:rPr lang="ko-KR" altLang="en-US" smtClean="0"/>
-              <a:t>2026-05-07</a:t>
+              <a:t>2026-05-18</a:t>
             </a:fld>
             <a:endParaRPr lang="ko-KR" altLang="en-US"/>
           </a:p>
@@ -618,7 +618,7 @@
           <a:p>
             <a:fld id="{AD24AED8-223C-4ADA-BBF9-2C880043F1F4}" type="datetimeFigureOut">
               <a:rPr lang="ko-KR" altLang="en-US" smtClean="0"/>
-              <a:t>2026-05-07</a:t>
+              <a:t>2026-05-18</a:t>
             </a:fld>
             <a:endParaRPr lang="ko-KR" altLang="en-US"/>
           </a:p>
@@ -788,7 +788,7 @@
           <a:p>
             <a:fld id="{AD24AED8-223C-4ADA-BBF9-2C880043F1F4}" type="datetimeFigureOut">
               <a:rPr lang="ko-KR" altLang="en-US" smtClean="0"/>
-              <a:t>2026-05-07</a:t>
+              <a:t>2026-05-18</a:t>
             </a:fld>
             <a:endParaRPr lang="ko-KR" altLang="en-US"/>
           </a:p>
@@ -1041,7 +1041,7 @@
           <a:p>
             <a:fld id="{AD24AED8-223C-4ADA-BBF9-2C880043F1F4}" type="datetimeFigureOut">
               <a:rPr lang="ko-KR" altLang="en-US" smtClean="0"/>
-              <a:t>2026-05-07</a:t>
+              <a:t>2026-05-18</a:t>
             </a:fld>
             <a:endParaRPr lang="ko-KR" altLang="en-US"/>
           </a:p>
@@ -1273,7 +1273,7 @@
           <a:p>
             <a:fld id="{AD24AED8-223C-4ADA-BBF9-2C880043F1F4}" type="datetimeFigureOut">
               <a:rPr lang="ko-KR" altLang="en-US" smtClean="0"/>
-              <a:t>2026-05-07</a:t>
+              <a:t>2026-05-18</a:t>
             </a:fld>
             <a:endParaRPr lang="ko-KR" altLang="en-US"/>
           </a:p>
@@ -1640,7 +1640,7 @@
           <a:p>
             <a:fld id="{AD24AED8-223C-4ADA-BBF9-2C880043F1F4}" type="datetimeFigureOut">
               <a:rPr lang="ko-KR" altLang="en-US" smtClean="0"/>
-              <a:t>2026-05-07</a:t>
+              <a:t>2026-05-18</a:t>
             </a:fld>
             <a:endParaRPr lang="ko-KR" altLang="en-US"/>
           </a:p>
@@ -1758,7 +1758,7 @@
           <a:p>
             <a:fld id="{AD24AED8-223C-4ADA-BBF9-2C880043F1F4}" type="datetimeFigureOut">
               <a:rPr lang="ko-KR" altLang="en-US" smtClean="0"/>
-              <a:t>2026-05-07</a:t>
+              <a:t>2026-05-18</a:t>
             </a:fld>
             <a:endParaRPr lang="ko-KR" altLang="en-US"/>
           </a:p>
@@ -1853,7 +1853,7 @@
           <a:p>
             <a:fld id="{AD24AED8-223C-4ADA-BBF9-2C880043F1F4}" type="datetimeFigureOut">
               <a:rPr lang="ko-KR" altLang="en-US" smtClean="0"/>
-              <a:t>2026-05-07</a:t>
+              <a:t>2026-05-18</a:t>
             </a:fld>
             <a:endParaRPr lang="ko-KR" altLang="en-US"/>
           </a:p>
@@ -2130,7 +2130,7 @@
           <a:p>
             <a:fld id="{AD24AED8-223C-4ADA-BBF9-2C880043F1F4}" type="datetimeFigureOut">
               <a:rPr lang="ko-KR" altLang="en-US" smtClean="0"/>
-              <a:t>2026-05-07</a:t>
+              <a:t>2026-05-18</a:t>
             </a:fld>
             <a:endParaRPr lang="ko-KR" altLang="en-US"/>
           </a:p>
@@ -2383,7 +2383,7 @@
           <a:p>
             <a:fld id="{AD24AED8-223C-4ADA-BBF9-2C880043F1F4}" type="datetimeFigureOut">
               <a:rPr lang="ko-KR" altLang="en-US" smtClean="0"/>
-              <a:t>2026-05-07</a:t>
+              <a:t>2026-05-18</a:t>
             </a:fld>
             <a:endParaRPr lang="ko-KR" altLang="en-US"/>
           </a:p>
@@ -2596,7 +2596,7 @@
           <a:p>
             <a:fld id="{AD24AED8-223C-4ADA-BBF9-2C880043F1F4}" type="datetimeFigureOut">
               <a:rPr lang="ko-KR" altLang="en-US" smtClean="0"/>
-              <a:t>2026-05-07</a:t>
+              <a:t>2026-05-18</a:t>
             </a:fld>
             <a:endParaRPr lang="ko-KR" altLang="en-US"/>
           </a:p>
@@ -6812,49 +6812,6 @@
       </p:sp>
       <p:sp>
         <p:nvSpPr>
-          <p:cNvPr id="38" name="TextBox 37"/>
-          <p:cNvSpPr txBox="1"/>
-          <p:nvPr/>
-        </p:nvSpPr>
-        <p:spPr>
-          <a:xfrm>
-            <a:off x="4647251" y="2799249"/>
-            <a:ext cx="2936188" cy="307777"/>
-          </a:xfrm>
-          <a:prstGeom prst="rect">
-            <a:avLst/>
-          </a:prstGeom>
-          <a:solidFill>
-            <a:srgbClr val="C00000"/>
-          </a:solidFill>
-        </p:spPr>
-        <p:txBody>
-          <a:bodyPr wrap="none" rtlCol="0">
-            <a:spAutoFit/>
-          </a:bodyPr>
-          <a:lstStyle/>
-          <a:p>
-            <a:r>
-              <a:rPr lang="en-US" altLang="ko-KR" sz="1400" dirty="0" err="1" smtClean="0">
-                <a:solidFill>
-                  <a:schemeClr val="bg1"/>
-                </a:solidFill>
-              </a:rPr>
-              <a:t>From_B</a:t>
-            </a:r>
-            <a:r>
-              <a:rPr lang="en-US" altLang="ko-KR" sz="1400" dirty="0" smtClean="0">
-                <a:solidFill>
-                  <a:schemeClr val="bg1"/>
-                </a:solidFill>
-              </a:rPr>
-              <a:t>: !Commit updated notice!</a:t>
-            </a:r>
-          </a:p>
-        </p:txBody>
-      </p:sp>
-      <p:sp>
-        <p:nvSpPr>
           <p:cNvPr id="44" name="TextBox 43"/>
           <p:cNvSpPr txBox="1"/>
           <p:nvPr/>
@@ -6922,6 +6879,70 @@
                 <a:schemeClr val="tx1">
                   <a:alpha val="19000"/>
                 </a:schemeClr>
+              </a:solidFill>
+            </a:endParaRPr>
+          </a:p>
+        </p:txBody>
+      </p:sp>
+      <p:sp>
+        <p:nvSpPr>
+          <p:cNvPr id="47" name="TextBox 46"/>
+          <p:cNvSpPr txBox="1"/>
+          <p:nvPr/>
+        </p:nvSpPr>
+        <p:spPr>
+          <a:xfrm>
+            <a:off x="4647251" y="2799249"/>
+            <a:ext cx="2950616" cy="307777"/>
+          </a:xfrm>
+          <a:prstGeom prst="rect">
+            <a:avLst/>
+          </a:prstGeom>
+          <a:solidFill>
+            <a:srgbClr val="C00000"/>
+          </a:solidFill>
+        </p:spPr>
+        <p:txBody>
+          <a:bodyPr wrap="none" rtlCol="0">
+            <a:spAutoFit/>
+          </a:bodyPr>
+          <a:lstStyle/>
+          <a:p>
+            <a:r>
+              <a:rPr lang="en-US" altLang="ko-KR" sz="1400" dirty="0" err="1" smtClean="0">
+                <a:solidFill>
+                  <a:schemeClr val="bg1"/>
+                </a:solidFill>
+              </a:rPr>
+              <a:t>From_A</a:t>
+            </a:r>
+            <a:r>
+              <a:rPr lang="en-US" altLang="ko-KR" sz="1400" dirty="0" smtClean="0">
+                <a:solidFill>
+                  <a:schemeClr val="bg1"/>
+                </a:solidFill>
+              </a:rPr>
+              <a:t>: </a:t>
+            </a:r>
+            <a:r>
+              <a:rPr lang="en-US" altLang="ko-KR" sz="1400" dirty="0" smtClean="0">
+                <a:solidFill>
+                  <a:schemeClr val="bg1"/>
+                </a:solidFill>
+              </a:rPr>
+              <a:t>!notice</a:t>
+            </a:r>
+            <a:r>
+              <a:rPr lang="en-US" altLang="ko-KR" sz="1400" dirty="0">
+                <a:solidFill>
+                  <a:schemeClr val="bg1"/>
+                </a:solidFill>
+              </a:rPr>
+              <a:t>! Commit updated</a:t>
+            </a:r>
+            <a:endParaRPr lang="en-US" altLang="ko-KR" sz="1400" dirty="0" smtClean="0">
+              <a:solidFill>
+                <a:schemeClr val="bg1"/>
               </a:solidFill>
             </a:endParaRPr>
           </a:p>
@@ -11107,49 +11128,6 @@
       </p:sp>
       <p:sp>
         <p:nvSpPr>
-          <p:cNvPr id="44" name="TextBox 43"/>
-          <p:cNvSpPr txBox="1"/>
-          <p:nvPr/>
-        </p:nvSpPr>
-        <p:spPr>
-          <a:xfrm>
-            <a:off x="4647251" y="2799249"/>
-            <a:ext cx="2936188" cy="307777"/>
-          </a:xfrm>
-          <a:prstGeom prst="rect">
-            <a:avLst/>
-          </a:prstGeom>
-          <a:solidFill>
-            <a:srgbClr val="C00000"/>
-          </a:solidFill>
-        </p:spPr>
-        <p:txBody>
-          <a:bodyPr wrap="none" rtlCol="0">
-            <a:spAutoFit/>
-          </a:bodyPr>
-          <a:lstStyle/>
-          <a:p>
-            <a:r>
-              <a:rPr lang="en-US" altLang="ko-KR" sz="1400" dirty="0" err="1" smtClean="0">
-                <a:solidFill>
-                  <a:schemeClr val="bg1"/>
-                </a:solidFill>
-              </a:rPr>
-              <a:t>From_C</a:t>
-            </a:r>
-            <a:r>
-              <a:rPr lang="en-US" altLang="ko-KR" sz="1400" dirty="0" smtClean="0">
-                <a:solidFill>
-                  <a:schemeClr val="bg1"/>
-                </a:solidFill>
-              </a:rPr>
-              <a:t>: !Commit updated notice!</a:t>
-            </a:r>
-          </a:p>
-        </p:txBody>
-      </p:sp>
-      <p:sp>
-        <p:nvSpPr>
           <p:cNvPr id="51" name="TextBox 50"/>
           <p:cNvSpPr txBox="1"/>
           <p:nvPr/>
@@ -11333,6 +11311,70 @@
                 <a:schemeClr val="tx1">
                   <a:alpha val="19000"/>
                 </a:schemeClr>
+              </a:solidFill>
+            </a:endParaRPr>
+          </a:p>
+        </p:txBody>
+      </p:sp>
+      <p:sp>
+        <p:nvSpPr>
+          <p:cNvPr id="38" name="TextBox 37"/>
+          <p:cNvSpPr txBox="1"/>
+          <p:nvPr/>
+        </p:nvSpPr>
+        <p:spPr>
+          <a:xfrm>
+            <a:off x="4647251" y="2799249"/>
+            <a:ext cx="2950616" cy="307777"/>
+          </a:xfrm>
+          <a:prstGeom prst="rect">
+            <a:avLst/>
+          </a:prstGeom>
+          <a:solidFill>
+            <a:srgbClr val="C00000"/>
+          </a:solidFill>
+        </p:spPr>
+        <p:txBody>
+          <a:bodyPr wrap="none" rtlCol="0">
+            <a:spAutoFit/>
+          </a:bodyPr>
+          <a:lstStyle/>
+          <a:p>
+            <a:r>
+              <a:rPr lang="en-US" altLang="ko-KR" sz="1400" dirty="0" err="1" smtClean="0">
+                <a:solidFill>
+                  <a:schemeClr val="bg1"/>
+                </a:solidFill>
+              </a:rPr>
+              <a:t>From_A</a:t>
+            </a:r>
+            <a:r>
+              <a:rPr lang="en-US" altLang="ko-KR" sz="1400" dirty="0" smtClean="0">
+                <a:solidFill>
+                  <a:schemeClr val="bg1"/>
+                </a:solidFill>
+              </a:rPr>
+              <a:t>: </a:t>
+            </a:r>
+            <a:r>
+              <a:rPr lang="en-US" altLang="ko-KR" sz="1400" dirty="0" smtClean="0">
+                <a:solidFill>
+                  <a:schemeClr val="bg1"/>
+                </a:solidFill>
+              </a:rPr>
+              <a:t>!notice</a:t>
+            </a:r>
+            <a:r>
+              <a:rPr lang="en-US" altLang="ko-KR" sz="1400" dirty="0">
+                <a:solidFill>
+                  <a:schemeClr val="bg1"/>
+                </a:solidFill>
+              </a:rPr>
+              <a:t>! Commit updated</a:t>
+            </a:r>
+            <a:endParaRPr lang="en-US" altLang="ko-KR" sz="1400" dirty="0" smtClean="0">
+              <a:solidFill>
+                <a:schemeClr val="bg1"/>
               </a:solidFill>
             </a:endParaRPr>
           </a:p>
@@ -13142,11 +13184,7 @@
           <a:p>
             <a:r>
               <a:rPr lang="en-US" altLang="ko-KR" sz="1400" dirty="0" smtClean="0"/>
-              <a:t>G </a:t>
-            </a:r>
-            <a:r>
-              <a:rPr lang="en-US" altLang="ko-KR" sz="1400" dirty="0" smtClean="0"/>
-              <a:t>commit</a:t>
+              <a:t>G commit</a:t>
             </a:r>
           </a:p>
         </p:txBody>
@@ -13241,11 +13279,7 @@
             </a:r>
             <a:r>
               <a:rPr lang="en-US" altLang="ko-KR" sz="1400" dirty="0" smtClean="0"/>
-              <a:t> </a:t>
-            </a:r>
-            <a:r>
-              <a:rPr lang="en-US" altLang="ko-KR" sz="1400" dirty="0" smtClean="0"/>
-              <a:t>commit</a:t>
+              <a:t> commit</a:t>
             </a:r>
           </a:p>
         </p:txBody>
@@ -14432,11 +14466,7 @@
           <a:p>
             <a:r>
               <a:rPr lang="en-US" altLang="ko-KR" sz="1400" dirty="0" smtClean="0"/>
-              <a:t>G </a:t>
-            </a:r>
-            <a:r>
-              <a:rPr lang="en-US" altLang="ko-KR" sz="1400" dirty="0" smtClean="0"/>
-              <a:t>commit</a:t>
+              <a:t>G commit</a:t>
             </a:r>
           </a:p>
         </p:txBody>
@@ -16000,7 +16030,7 @@
         <p:spPr>
           <a:xfrm>
             <a:off x="4647251" y="2799249"/>
-            <a:ext cx="2936188" cy="307777"/>
+            <a:ext cx="2950616" cy="307777"/>
           </a:xfrm>
           <a:prstGeom prst="rect">
             <a:avLst/>
@@ -16029,8 +16059,29 @@
                   <a:schemeClr val="bg1"/>
                 </a:solidFill>
               </a:rPr>
-              <a:t>: !Commit updated notice!</a:t>
-            </a:r>
+              <a:t>: </a:t>
+            </a:r>
+            <a:r>
+              <a:rPr lang="en-US" altLang="ko-KR" sz="1400" dirty="0" smtClean="0">
+                <a:solidFill>
+                  <a:schemeClr val="bg1"/>
+                </a:solidFill>
+              </a:rPr>
+              <a:t>!notice</a:t>
+            </a:r>
+            <a:r>
+              <a:rPr lang="en-US" altLang="ko-KR" sz="1400" dirty="0">
+                <a:solidFill>
+                  <a:schemeClr val="bg1"/>
+                </a:solidFill>
+              </a:rPr>
+              <a:t>! Commit updated</a:t>
+            </a:r>
+            <a:endParaRPr lang="en-US" altLang="ko-KR" sz="1400" dirty="0" smtClean="0">
+              <a:solidFill>
+                <a:schemeClr val="bg1"/>
+              </a:solidFill>
+            </a:endParaRPr>
           </a:p>
         </p:txBody>
       </p:sp>
